--- a/diagrams/Diagrams.pptx
+++ b/diagrams/Diagrams.pptx
@@ -18,6 +18,7 @@
     <p:sldId id="266" r:id="rId12"/>
     <p:sldId id="267" r:id="rId13"/>
     <p:sldId id="268" r:id="rId14"/>
+    <p:sldId id="270" r:id="rId15"/>
   </p:sldIdLst>
   <p:sldSz cx="12192000" cy="6858000"/>
   <p:notesSz cx="6858000" cy="9144000"/>
@@ -273,7 +274,7 @@
           <a:p>
             <a:fld id="{E661C373-98A3-4876-B8FE-FEB4A308698B}" type="datetimeFigureOut">
               <a:rPr lang="en-GB" smtClean="0"/>
-              <a:t>10/04/2026</a:t>
+              <a:t>12/04/2026</a:t>
             </a:fld>
             <a:endParaRPr lang="en-GB"/>
           </a:p>
@@ -473,7 +474,7 @@
           <a:p>
             <a:fld id="{E661C373-98A3-4876-B8FE-FEB4A308698B}" type="datetimeFigureOut">
               <a:rPr lang="en-GB" smtClean="0"/>
-              <a:t>10/04/2026</a:t>
+              <a:t>12/04/2026</a:t>
             </a:fld>
             <a:endParaRPr lang="en-GB"/>
           </a:p>
@@ -683,7 +684,7 @@
           <a:p>
             <a:fld id="{E661C373-98A3-4876-B8FE-FEB4A308698B}" type="datetimeFigureOut">
               <a:rPr lang="en-GB" smtClean="0"/>
-              <a:t>10/04/2026</a:t>
+              <a:t>12/04/2026</a:t>
             </a:fld>
             <a:endParaRPr lang="en-GB"/>
           </a:p>
@@ -883,7 +884,7 @@
           <a:p>
             <a:fld id="{E661C373-98A3-4876-B8FE-FEB4A308698B}" type="datetimeFigureOut">
               <a:rPr lang="en-GB" smtClean="0"/>
-              <a:t>10/04/2026</a:t>
+              <a:t>12/04/2026</a:t>
             </a:fld>
             <a:endParaRPr lang="en-GB"/>
           </a:p>
@@ -1159,7 +1160,7 @@
           <a:p>
             <a:fld id="{E661C373-98A3-4876-B8FE-FEB4A308698B}" type="datetimeFigureOut">
               <a:rPr lang="en-GB" smtClean="0"/>
-              <a:t>10/04/2026</a:t>
+              <a:t>12/04/2026</a:t>
             </a:fld>
             <a:endParaRPr lang="en-GB"/>
           </a:p>
@@ -1427,7 +1428,7 @@
           <a:p>
             <a:fld id="{E661C373-98A3-4876-B8FE-FEB4A308698B}" type="datetimeFigureOut">
               <a:rPr lang="en-GB" smtClean="0"/>
-              <a:t>10/04/2026</a:t>
+              <a:t>12/04/2026</a:t>
             </a:fld>
             <a:endParaRPr lang="en-GB"/>
           </a:p>
@@ -1842,7 +1843,7 @@
           <a:p>
             <a:fld id="{E661C373-98A3-4876-B8FE-FEB4A308698B}" type="datetimeFigureOut">
               <a:rPr lang="en-GB" smtClean="0"/>
-              <a:t>10/04/2026</a:t>
+              <a:t>12/04/2026</a:t>
             </a:fld>
             <a:endParaRPr lang="en-GB"/>
           </a:p>
@@ -1984,7 +1985,7 @@
           <a:p>
             <a:fld id="{E661C373-98A3-4876-B8FE-FEB4A308698B}" type="datetimeFigureOut">
               <a:rPr lang="en-GB" smtClean="0"/>
-              <a:t>10/04/2026</a:t>
+              <a:t>12/04/2026</a:t>
             </a:fld>
             <a:endParaRPr lang="en-GB"/>
           </a:p>
@@ -2097,7 +2098,7 @@
           <a:p>
             <a:fld id="{E661C373-98A3-4876-B8FE-FEB4A308698B}" type="datetimeFigureOut">
               <a:rPr lang="en-GB" smtClean="0"/>
-              <a:t>10/04/2026</a:t>
+              <a:t>12/04/2026</a:t>
             </a:fld>
             <a:endParaRPr lang="en-GB"/>
           </a:p>
@@ -2410,7 +2411,7 @@
           <a:p>
             <a:fld id="{E661C373-98A3-4876-B8FE-FEB4A308698B}" type="datetimeFigureOut">
               <a:rPr lang="en-GB" smtClean="0"/>
-              <a:t>10/04/2026</a:t>
+              <a:t>12/04/2026</a:t>
             </a:fld>
             <a:endParaRPr lang="en-GB"/>
           </a:p>
@@ -2699,7 +2700,7 @@
           <a:p>
             <a:fld id="{E661C373-98A3-4876-B8FE-FEB4A308698B}" type="datetimeFigureOut">
               <a:rPr lang="en-GB" smtClean="0"/>
-              <a:t>10/04/2026</a:t>
+              <a:t>12/04/2026</a:t>
             </a:fld>
             <a:endParaRPr lang="en-GB"/>
           </a:p>
@@ -2942,7 +2943,7 @@
           <a:p>
             <a:fld id="{E661C373-98A3-4876-B8FE-FEB4A308698B}" type="datetimeFigureOut">
               <a:rPr lang="en-GB" smtClean="0"/>
-              <a:t>10/04/2026</a:t>
+              <a:t>12/04/2026</a:t>
             </a:fld>
             <a:endParaRPr lang="en-GB"/>
           </a:p>
@@ -9152,6 +9153,1950 @@
 </p:sld>
 </file>
 
+<file path=ppt/slides/slide14.xml><?xml version="1.0" encoding="utf-8"?>
+<p:sld xmlns:a="http://schemas.openxmlformats.org/drawingml/2006/main" xmlns:r="http://schemas.openxmlformats.org/officeDocument/2006/relationships" xmlns:p="http://schemas.openxmlformats.org/presentationml/2006/main">
+  <p:cSld>
+    <p:spTree>
+      <p:nvGrpSpPr>
+        <p:cNvPr id="1" name=""/>
+        <p:cNvGrpSpPr/>
+        <p:nvPr/>
+      </p:nvGrpSpPr>
+      <p:grpSpPr>
+        <a:xfrm>
+          <a:off x="0" y="0"/>
+          <a:ext cx="0" cy="0"/>
+          <a:chOff x="0" y="0"/>
+          <a:chExt cx="0" cy="0"/>
+        </a:xfrm>
+      </p:grpSpPr>
+      <p:sp>
+        <p:nvSpPr>
+          <p:cNvPr id="2" name="Rectangle 1">
+            <a:extLst>
+              <a:ext uri="{FF2B5EF4-FFF2-40B4-BE49-F238E27FC236}">
+                <a16:creationId xmlns:a16="http://schemas.microsoft.com/office/drawing/2014/main" id="{60B2F7AA-D969-A42B-1968-F7330BB8E7CB}"/>
+              </a:ext>
+            </a:extLst>
+          </p:cNvPr>
+          <p:cNvSpPr/>
+          <p:nvPr/>
+        </p:nvSpPr>
+        <p:spPr>
+          <a:xfrm>
+            <a:off x="1185333" y="1481667"/>
+            <a:ext cx="2683934" cy="4394200"/>
+          </a:xfrm>
+          <a:prstGeom prst="rect">
+            <a:avLst/>
+          </a:prstGeom>
+        </p:spPr>
+        <p:style>
+          <a:lnRef idx="2">
+            <a:schemeClr val="accent1">
+              <a:shade val="15000"/>
+            </a:schemeClr>
+          </a:lnRef>
+          <a:fillRef idx="1">
+            <a:schemeClr val="accent1"/>
+          </a:fillRef>
+          <a:effectRef idx="0">
+            <a:schemeClr val="accent1"/>
+          </a:effectRef>
+          <a:fontRef idx="minor">
+            <a:schemeClr val="lt1"/>
+          </a:fontRef>
+        </p:style>
+        <p:txBody>
+          <a:bodyPr rtlCol="0" anchor="ctr"/>
+          <a:lstStyle/>
+          <a:p>
+            <a:pPr algn="ctr"/>
+            <a:endParaRPr lang="en-NZ"/>
+          </a:p>
+        </p:txBody>
+      </p:sp>
+      <p:sp>
+        <p:nvSpPr>
+          <p:cNvPr id="3" name="Rectangle 2">
+            <a:extLst>
+              <a:ext uri="{FF2B5EF4-FFF2-40B4-BE49-F238E27FC236}">
+                <a16:creationId xmlns:a16="http://schemas.microsoft.com/office/drawing/2014/main" id="{60BC6A11-68E9-B8BF-F196-1F2A9F05CA37}"/>
+              </a:ext>
+            </a:extLst>
+          </p:cNvPr>
+          <p:cNvSpPr/>
+          <p:nvPr/>
+        </p:nvSpPr>
+        <p:spPr>
+          <a:xfrm>
+            <a:off x="1185333" y="1998133"/>
+            <a:ext cx="2683934" cy="135467"/>
+          </a:xfrm>
+          <a:prstGeom prst="rect">
+            <a:avLst/>
+          </a:prstGeom>
+          <a:solidFill>
+            <a:schemeClr val="accent2"/>
+          </a:solidFill>
+        </p:spPr>
+        <p:style>
+          <a:lnRef idx="2">
+            <a:schemeClr val="accent1">
+              <a:shade val="15000"/>
+            </a:schemeClr>
+          </a:lnRef>
+          <a:fillRef idx="1">
+            <a:schemeClr val="accent1"/>
+          </a:fillRef>
+          <a:effectRef idx="0">
+            <a:schemeClr val="accent1"/>
+          </a:effectRef>
+          <a:fontRef idx="minor">
+            <a:schemeClr val="lt1"/>
+          </a:fontRef>
+        </p:style>
+        <p:txBody>
+          <a:bodyPr rtlCol="0" anchor="ctr"/>
+          <a:lstStyle/>
+          <a:p>
+            <a:pPr algn="ctr"/>
+            <a:endParaRPr lang="en-NZ"/>
+          </a:p>
+        </p:txBody>
+      </p:sp>
+      <p:sp>
+        <p:nvSpPr>
+          <p:cNvPr id="4" name="Rectangle 3">
+            <a:extLst>
+              <a:ext uri="{FF2B5EF4-FFF2-40B4-BE49-F238E27FC236}">
+                <a16:creationId xmlns:a16="http://schemas.microsoft.com/office/drawing/2014/main" id="{646F084B-05FF-0728-AE6E-90A043852A67}"/>
+              </a:ext>
+            </a:extLst>
+          </p:cNvPr>
+          <p:cNvSpPr/>
+          <p:nvPr/>
+        </p:nvSpPr>
+        <p:spPr>
+          <a:xfrm>
+            <a:off x="1185333" y="2954866"/>
+            <a:ext cx="2683934" cy="135467"/>
+          </a:xfrm>
+          <a:prstGeom prst="rect">
+            <a:avLst/>
+          </a:prstGeom>
+          <a:solidFill>
+            <a:schemeClr val="accent4">
+              <a:lumMod val="75000"/>
+            </a:schemeClr>
+          </a:solidFill>
+        </p:spPr>
+        <p:style>
+          <a:lnRef idx="2">
+            <a:schemeClr val="accent1">
+              <a:shade val="15000"/>
+            </a:schemeClr>
+          </a:lnRef>
+          <a:fillRef idx="1">
+            <a:schemeClr val="accent1"/>
+          </a:fillRef>
+          <a:effectRef idx="0">
+            <a:schemeClr val="accent1"/>
+          </a:effectRef>
+          <a:fontRef idx="minor">
+            <a:schemeClr val="lt1"/>
+          </a:fontRef>
+        </p:style>
+        <p:txBody>
+          <a:bodyPr rtlCol="0" anchor="ctr"/>
+          <a:lstStyle/>
+          <a:p>
+            <a:pPr algn="ctr"/>
+            <a:endParaRPr lang="en-NZ"/>
+          </a:p>
+        </p:txBody>
+      </p:sp>
+      <p:sp>
+        <p:nvSpPr>
+          <p:cNvPr id="5" name="Rectangle 4">
+            <a:extLst>
+              <a:ext uri="{FF2B5EF4-FFF2-40B4-BE49-F238E27FC236}">
+                <a16:creationId xmlns:a16="http://schemas.microsoft.com/office/drawing/2014/main" id="{35A2B7E7-42A3-B45B-CFA2-CE2BDDD09774}"/>
+              </a:ext>
+            </a:extLst>
+          </p:cNvPr>
+          <p:cNvSpPr/>
+          <p:nvPr/>
+        </p:nvSpPr>
+        <p:spPr>
+          <a:xfrm>
+            <a:off x="1185333" y="3090333"/>
+            <a:ext cx="2683934" cy="135467"/>
+          </a:xfrm>
+          <a:prstGeom prst="rect">
+            <a:avLst/>
+          </a:prstGeom>
+          <a:solidFill>
+            <a:schemeClr val="accent6">
+              <a:lumMod val="75000"/>
+            </a:schemeClr>
+          </a:solidFill>
+        </p:spPr>
+        <p:style>
+          <a:lnRef idx="2">
+            <a:schemeClr val="accent1">
+              <a:shade val="15000"/>
+            </a:schemeClr>
+          </a:lnRef>
+          <a:fillRef idx="1">
+            <a:schemeClr val="accent1"/>
+          </a:fillRef>
+          <a:effectRef idx="0">
+            <a:schemeClr val="accent1"/>
+          </a:effectRef>
+          <a:fontRef idx="minor">
+            <a:schemeClr val="lt1"/>
+          </a:fontRef>
+        </p:style>
+        <p:txBody>
+          <a:bodyPr rtlCol="0" anchor="ctr"/>
+          <a:lstStyle/>
+          <a:p>
+            <a:pPr algn="ctr"/>
+            <a:endParaRPr lang="en-NZ"/>
+          </a:p>
+        </p:txBody>
+      </p:sp>
+      <p:sp>
+        <p:nvSpPr>
+          <p:cNvPr id="6" name="Rectangle 5">
+            <a:extLst>
+              <a:ext uri="{FF2B5EF4-FFF2-40B4-BE49-F238E27FC236}">
+                <a16:creationId xmlns:a16="http://schemas.microsoft.com/office/drawing/2014/main" id="{68816FED-B454-EEA8-5889-DB4648F6A7FA}"/>
+              </a:ext>
+            </a:extLst>
+          </p:cNvPr>
+          <p:cNvSpPr/>
+          <p:nvPr/>
+        </p:nvSpPr>
+        <p:spPr>
+          <a:xfrm>
+            <a:off x="1185333" y="3979333"/>
+            <a:ext cx="2683934" cy="135467"/>
+          </a:xfrm>
+          <a:prstGeom prst="rect">
+            <a:avLst/>
+          </a:prstGeom>
+          <a:solidFill>
+            <a:schemeClr val="tx2">
+              <a:lumMod val="20000"/>
+              <a:lumOff val="80000"/>
+            </a:schemeClr>
+          </a:solidFill>
+        </p:spPr>
+        <p:style>
+          <a:lnRef idx="2">
+            <a:schemeClr val="accent1">
+              <a:shade val="15000"/>
+            </a:schemeClr>
+          </a:lnRef>
+          <a:fillRef idx="1">
+            <a:schemeClr val="accent1"/>
+          </a:fillRef>
+          <a:effectRef idx="0">
+            <a:schemeClr val="accent1"/>
+          </a:effectRef>
+          <a:fontRef idx="minor">
+            <a:schemeClr val="lt1"/>
+          </a:fontRef>
+        </p:style>
+        <p:txBody>
+          <a:bodyPr rtlCol="0" anchor="ctr"/>
+          <a:lstStyle/>
+          <a:p>
+            <a:pPr algn="ctr"/>
+            <a:endParaRPr lang="en-NZ"/>
+          </a:p>
+        </p:txBody>
+      </p:sp>
+      <p:sp>
+        <p:nvSpPr>
+          <p:cNvPr id="7" name="Rectangle 6">
+            <a:extLst>
+              <a:ext uri="{FF2B5EF4-FFF2-40B4-BE49-F238E27FC236}">
+                <a16:creationId xmlns:a16="http://schemas.microsoft.com/office/drawing/2014/main" id="{BC66AF98-C661-C6FC-1B45-BAF157DB37B1}"/>
+              </a:ext>
+            </a:extLst>
+          </p:cNvPr>
+          <p:cNvSpPr/>
+          <p:nvPr/>
+        </p:nvSpPr>
+        <p:spPr>
+          <a:xfrm>
+            <a:off x="1185333" y="5376333"/>
+            <a:ext cx="2683934" cy="135467"/>
+          </a:xfrm>
+          <a:prstGeom prst="rect">
+            <a:avLst/>
+          </a:prstGeom>
+          <a:solidFill>
+            <a:srgbClr val="FFFF00"/>
+          </a:solidFill>
+        </p:spPr>
+        <p:style>
+          <a:lnRef idx="2">
+            <a:schemeClr val="accent1">
+              <a:shade val="15000"/>
+            </a:schemeClr>
+          </a:lnRef>
+          <a:fillRef idx="1">
+            <a:schemeClr val="accent1"/>
+          </a:fillRef>
+          <a:effectRef idx="0">
+            <a:schemeClr val="accent1"/>
+          </a:effectRef>
+          <a:fontRef idx="minor">
+            <a:schemeClr val="lt1"/>
+          </a:fontRef>
+        </p:style>
+        <p:txBody>
+          <a:bodyPr rtlCol="0" anchor="ctr"/>
+          <a:lstStyle/>
+          <a:p>
+            <a:pPr algn="ctr"/>
+            <a:endParaRPr lang="en-NZ"/>
+          </a:p>
+        </p:txBody>
+      </p:sp>
+      <p:sp>
+        <p:nvSpPr>
+          <p:cNvPr id="8" name="Rectangle 7">
+            <a:extLst>
+              <a:ext uri="{FF2B5EF4-FFF2-40B4-BE49-F238E27FC236}">
+                <a16:creationId xmlns:a16="http://schemas.microsoft.com/office/drawing/2014/main" id="{CA639E42-A04B-CF65-F0A4-FA7F0FECA75C}"/>
+              </a:ext>
+            </a:extLst>
+          </p:cNvPr>
+          <p:cNvSpPr/>
+          <p:nvPr/>
+        </p:nvSpPr>
+        <p:spPr>
+          <a:xfrm>
+            <a:off x="1185333" y="2442633"/>
+            <a:ext cx="2683934" cy="135467"/>
+          </a:xfrm>
+          <a:prstGeom prst="rect">
+            <a:avLst/>
+          </a:prstGeom>
+          <a:solidFill>
+            <a:schemeClr val="accent2">
+              <a:lumMod val="50000"/>
+            </a:schemeClr>
+          </a:solidFill>
+        </p:spPr>
+        <p:style>
+          <a:lnRef idx="2">
+            <a:schemeClr val="accent1">
+              <a:shade val="15000"/>
+            </a:schemeClr>
+          </a:lnRef>
+          <a:fillRef idx="1">
+            <a:schemeClr val="accent1"/>
+          </a:fillRef>
+          <a:effectRef idx="0">
+            <a:schemeClr val="accent1"/>
+          </a:effectRef>
+          <a:fontRef idx="minor">
+            <a:schemeClr val="lt1"/>
+          </a:fontRef>
+        </p:style>
+        <p:txBody>
+          <a:bodyPr rtlCol="0" anchor="ctr"/>
+          <a:lstStyle/>
+          <a:p>
+            <a:pPr algn="ctr"/>
+            <a:endParaRPr lang="en-NZ"/>
+          </a:p>
+        </p:txBody>
+      </p:sp>
+      <p:sp>
+        <p:nvSpPr>
+          <p:cNvPr id="9" name="Rectangle 8">
+            <a:extLst>
+              <a:ext uri="{FF2B5EF4-FFF2-40B4-BE49-F238E27FC236}">
+                <a16:creationId xmlns:a16="http://schemas.microsoft.com/office/drawing/2014/main" id="{A8153EFB-CDD9-59B5-DB43-C054723BC9E2}"/>
+              </a:ext>
+            </a:extLst>
+          </p:cNvPr>
+          <p:cNvSpPr/>
+          <p:nvPr/>
+        </p:nvSpPr>
+        <p:spPr>
+          <a:xfrm>
+            <a:off x="4754033" y="3090333"/>
+            <a:ext cx="2683934" cy="135467"/>
+          </a:xfrm>
+          <a:prstGeom prst="rect">
+            <a:avLst/>
+          </a:prstGeom>
+          <a:solidFill>
+            <a:schemeClr val="accent2"/>
+          </a:solidFill>
+        </p:spPr>
+        <p:style>
+          <a:lnRef idx="2">
+            <a:schemeClr val="accent1">
+              <a:shade val="15000"/>
+            </a:schemeClr>
+          </a:lnRef>
+          <a:fillRef idx="1">
+            <a:schemeClr val="accent1"/>
+          </a:fillRef>
+          <a:effectRef idx="0">
+            <a:schemeClr val="accent1"/>
+          </a:effectRef>
+          <a:fontRef idx="minor">
+            <a:schemeClr val="lt1"/>
+          </a:fontRef>
+        </p:style>
+        <p:txBody>
+          <a:bodyPr rtlCol="0" anchor="ctr"/>
+          <a:lstStyle/>
+          <a:p>
+            <a:pPr algn="ctr"/>
+            <a:endParaRPr lang="en-NZ"/>
+          </a:p>
+        </p:txBody>
+      </p:sp>
+      <p:sp>
+        <p:nvSpPr>
+          <p:cNvPr id="10" name="Rectangle 9">
+            <a:extLst>
+              <a:ext uri="{FF2B5EF4-FFF2-40B4-BE49-F238E27FC236}">
+                <a16:creationId xmlns:a16="http://schemas.microsoft.com/office/drawing/2014/main" id="{558D5FD0-5275-999B-5CDD-E7C054F68513}"/>
+              </a:ext>
+            </a:extLst>
+          </p:cNvPr>
+          <p:cNvSpPr/>
+          <p:nvPr/>
+        </p:nvSpPr>
+        <p:spPr>
+          <a:xfrm>
+            <a:off x="4754033" y="3225800"/>
+            <a:ext cx="2683934" cy="135467"/>
+          </a:xfrm>
+          <a:prstGeom prst="rect">
+            <a:avLst/>
+          </a:prstGeom>
+          <a:solidFill>
+            <a:schemeClr val="accent2">
+              <a:lumMod val="50000"/>
+            </a:schemeClr>
+          </a:solidFill>
+        </p:spPr>
+        <p:style>
+          <a:lnRef idx="2">
+            <a:schemeClr val="accent1">
+              <a:shade val="15000"/>
+            </a:schemeClr>
+          </a:lnRef>
+          <a:fillRef idx="1">
+            <a:schemeClr val="accent1"/>
+          </a:fillRef>
+          <a:effectRef idx="0">
+            <a:schemeClr val="accent1"/>
+          </a:effectRef>
+          <a:fontRef idx="minor">
+            <a:schemeClr val="lt1"/>
+          </a:fontRef>
+        </p:style>
+        <p:txBody>
+          <a:bodyPr rtlCol="0" anchor="ctr"/>
+          <a:lstStyle/>
+          <a:p>
+            <a:pPr algn="ctr"/>
+            <a:endParaRPr lang="en-NZ"/>
+          </a:p>
+        </p:txBody>
+      </p:sp>
+      <p:sp>
+        <p:nvSpPr>
+          <p:cNvPr id="11" name="Rectangle 10">
+            <a:extLst>
+              <a:ext uri="{FF2B5EF4-FFF2-40B4-BE49-F238E27FC236}">
+                <a16:creationId xmlns:a16="http://schemas.microsoft.com/office/drawing/2014/main" id="{70F794E8-6E1D-89F0-7A49-19A9DDB1B0F2}"/>
+              </a:ext>
+            </a:extLst>
+          </p:cNvPr>
+          <p:cNvSpPr/>
+          <p:nvPr/>
+        </p:nvSpPr>
+        <p:spPr>
+          <a:xfrm>
+            <a:off x="4754033" y="3361266"/>
+            <a:ext cx="2683934" cy="135467"/>
+          </a:xfrm>
+          <a:prstGeom prst="rect">
+            <a:avLst/>
+          </a:prstGeom>
+          <a:solidFill>
+            <a:schemeClr val="accent4">
+              <a:lumMod val="75000"/>
+            </a:schemeClr>
+          </a:solidFill>
+        </p:spPr>
+        <p:style>
+          <a:lnRef idx="2">
+            <a:schemeClr val="accent1">
+              <a:shade val="15000"/>
+            </a:schemeClr>
+          </a:lnRef>
+          <a:fillRef idx="1">
+            <a:schemeClr val="accent1"/>
+          </a:fillRef>
+          <a:effectRef idx="0">
+            <a:schemeClr val="accent1"/>
+          </a:effectRef>
+          <a:fontRef idx="minor">
+            <a:schemeClr val="lt1"/>
+          </a:fontRef>
+        </p:style>
+        <p:txBody>
+          <a:bodyPr rtlCol="0" anchor="ctr"/>
+          <a:lstStyle/>
+          <a:p>
+            <a:pPr algn="ctr"/>
+            <a:endParaRPr lang="en-NZ"/>
+          </a:p>
+        </p:txBody>
+      </p:sp>
+      <p:sp>
+        <p:nvSpPr>
+          <p:cNvPr id="12" name="Rectangle 11">
+            <a:extLst>
+              <a:ext uri="{FF2B5EF4-FFF2-40B4-BE49-F238E27FC236}">
+                <a16:creationId xmlns:a16="http://schemas.microsoft.com/office/drawing/2014/main" id="{B7D40267-5DC3-D4B1-82B2-DEC96957A15E}"/>
+              </a:ext>
+            </a:extLst>
+          </p:cNvPr>
+          <p:cNvSpPr/>
+          <p:nvPr/>
+        </p:nvSpPr>
+        <p:spPr>
+          <a:xfrm>
+            <a:off x="4754033" y="3496733"/>
+            <a:ext cx="2683934" cy="135467"/>
+          </a:xfrm>
+          <a:prstGeom prst="rect">
+            <a:avLst/>
+          </a:prstGeom>
+          <a:solidFill>
+            <a:schemeClr val="accent6">
+              <a:lumMod val="75000"/>
+            </a:schemeClr>
+          </a:solidFill>
+        </p:spPr>
+        <p:style>
+          <a:lnRef idx="2">
+            <a:schemeClr val="accent1">
+              <a:shade val="15000"/>
+            </a:schemeClr>
+          </a:lnRef>
+          <a:fillRef idx="1">
+            <a:schemeClr val="accent1"/>
+          </a:fillRef>
+          <a:effectRef idx="0">
+            <a:schemeClr val="accent1"/>
+          </a:effectRef>
+          <a:fontRef idx="minor">
+            <a:schemeClr val="lt1"/>
+          </a:fontRef>
+        </p:style>
+        <p:txBody>
+          <a:bodyPr rtlCol="0" anchor="ctr"/>
+          <a:lstStyle/>
+          <a:p>
+            <a:pPr algn="ctr"/>
+            <a:endParaRPr lang="en-NZ"/>
+          </a:p>
+        </p:txBody>
+      </p:sp>
+      <p:sp>
+        <p:nvSpPr>
+          <p:cNvPr id="13" name="Rectangle 12">
+            <a:extLst>
+              <a:ext uri="{FF2B5EF4-FFF2-40B4-BE49-F238E27FC236}">
+                <a16:creationId xmlns:a16="http://schemas.microsoft.com/office/drawing/2014/main" id="{5F409FA9-D057-61B6-B38F-9F0FBCE35191}"/>
+              </a:ext>
+            </a:extLst>
+          </p:cNvPr>
+          <p:cNvSpPr/>
+          <p:nvPr/>
+        </p:nvSpPr>
+        <p:spPr>
+          <a:xfrm>
+            <a:off x="4754033" y="3632199"/>
+            <a:ext cx="2683934" cy="135467"/>
+          </a:xfrm>
+          <a:prstGeom prst="rect">
+            <a:avLst/>
+          </a:prstGeom>
+          <a:solidFill>
+            <a:schemeClr val="tx2">
+              <a:lumMod val="20000"/>
+              <a:lumOff val="80000"/>
+            </a:schemeClr>
+          </a:solidFill>
+        </p:spPr>
+        <p:style>
+          <a:lnRef idx="2">
+            <a:schemeClr val="accent1">
+              <a:shade val="15000"/>
+            </a:schemeClr>
+          </a:lnRef>
+          <a:fillRef idx="1">
+            <a:schemeClr val="accent1"/>
+          </a:fillRef>
+          <a:effectRef idx="0">
+            <a:schemeClr val="accent1"/>
+          </a:effectRef>
+          <a:fontRef idx="minor">
+            <a:schemeClr val="lt1"/>
+          </a:fontRef>
+        </p:style>
+        <p:txBody>
+          <a:bodyPr rtlCol="0" anchor="ctr"/>
+          <a:lstStyle/>
+          <a:p>
+            <a:pPr algn="ctr"/>
+            <a:endParaRPr lang="en-NZ"/>
+          </a:p>
+        </p:txBody>
+      </p:sp>
+      <p:sp>
+        <p:nvSpPr>
+          <p:cNvPr id="14" name="Rectangle 13">
+            <a:extLst>
+              <a:ext uri="{FF2B5EF4-FFF2-40B4-BE49-F238E27FC236}">
+                <a16:creationId xmlns:a16="http://schemas.microsoft.com/office/drawing/2014/main" id="{0A4B9E43-9DDF-ABA4-EBD9-4E016680EDB0}"/>
+              </a:ext>
+            </a:extLst>
+          </p:cNvPr>
+          <p:cNvSpPr/>
+          <p:nvPr/>
+        </p:nvSpPr>
+        <p:spPr>
+          <a:xfrm>
+            <a:off x="4754033" y="3767666"/>
+            <a:ext cx="2683934" cy="135467"/>
+          </a:xfrm>
+          <a:prstGeom prst="rect">
+            <a:avLst/>
+          </a:prstGeom>
+          <a:solidFill>
+            <a:srgbClr val="FFFF00"/>
+          </a:solidFill>
+        </p:spPr>
+        <p:style>
+          <a:lnRef idx="2">
+            <a:schemeClr val="accent1">
+              <a:shade val="15000"/>
+            </a:schemeClr>
+          </a:lnRef>
+          <a:fillRef idx="1">
+            <a:schemeClr val="accent1"/>
+          </a:fillRef>
+          <a:effectRef idx="0">
+            <a:schemeClr val="accent1"/>
+          </a:effectRef>
+          <a:fontRef idx="minor">
+            <a:schemeClr val="lt1"/>
+          </a:fontRef>
+        </p:style>
+        <p:txBody>
+          <a:bodyPr rtlCol="0" anchor="ctr"/>
+          <a:lstStyle/>
+          <a:p>
+            <a:pPr algn="ctr"/>
+            <a:endParaRPr lang="en-NZ"/>
+          </a:p>
+        </p:txBody>
+      </p:sp>
+      <p:sp>
+        <p:nvSpPr>
+          <p:cNvPr id="15" name="Rectangle 14">
+            <a:extLst>
+              <a:ext uri="{FF2B5EF4-FFF2-40B4-BE49-F238E27FC236}">
+                <a16:creationId xmlns:a16="http://schemas.microsoft.com/office/drawing/2014/main" id="{030079DB-6379-D015-106D-245A29E21180}"/>
+              </a:ext>
+            </a:extLst>
+          </p:cNvPr>
+          <p:cNvSpPr/>
+          <p:nvPr/>
+        </p:nvSpPr>
+        <p:spPr>
+          <a:xfrm>
+            <a:off x="8322735" y="1481667"/>
+            <a:ext cx="2683934" cy="863600"/>
+          </a:xfrm>
+          <a:prstGeom prst="rect">
+            <a:avLst/>
+          </a:prstGeom>
+          <a:solidFill>
+            <a:schemeClr val="accent2"/>
+          </a:solidFill>
+        </p:spPr>
+        <p:style>
+          <a:lnRef idx="2">
+            <a:schemeClr val="accent1">
+              <a:shade val="15000"/>
+            </a:schemeClr>
+          </a:lnRef>
+          <a:fillRef idx="1">
+            <a:schemeClr val="accent1"/>
+          </a:fillRef>
+          <a:effectRef idx="0">
+            <a:schemeClr val="accent1"/>
+          </a:effectRef>
+          <a:fontRef idx="minor">
+            <a:schemeClr val="lt1"/>
+          </a:fontRef>
+        </p:style>
+        <p:txBody>
+          <a:bodyPr rtlCol="0" anchor="ctr"/>
+          <a:lstStyle/>
+          <a:p>
+            <a:pPr algn="ctr"/>
+            <a:endParaRPr lang="en-NZ"/>
+          </a:p>
+        </p:txBody>
+      </p:sp>
+      <p:sp>
+        <p:nvSpPr>
+          <p:cNvPr id="16" name="Rectangle 15">
+            <a:extLst>
+              <a:ext uri="{FF2B5EF4-FFF2-40B4-BE49-F238E27FC236}">
+                <a16:creationId xmlns:a16="http://schemas.microsoft.com/office/drawing/2014/main" id="{BBD6082B-C2F4-8C59-471C-811577401EE6}"/>
+              </a:ext>
+            </a:extLst>
+          </p:cNvPr>
+          <p:cNvSpPr/>
+          <p:nvPr/>
+        </p:nvSpPr>
+        <p:spPr>
+          <a:xfrm>
+            <a:off x="8322735" y="2345267"/>
+            <a:ext cx="2683934" cy="863600"/>
+          </a:xfrm>
+          <a:prstGeom prst="rect">
+            <a:avLst/>
+          </a:prstGeom>
+          <a:solidFill>
+            <a:schemeClr val="accent2">
+              <a:lumMod val="50000"/>
+            </a:schemeClr>
+          </a:solidFill>
+        </p:spPr>
+        <p:style>
+          <a:lnRef idx="2">
+            <a:schemeClr val="accent1">
+              <a:shade val="15000"/>
+            </a:schemeClr>
+          </a:lnRef>
+          <a:fillRef idx="1">
+            <a:schemeClr val="accent1"/>
+          </a:fillRef>
+          <a:effectRef idx="0">
+            <a:schemeClr val="accent1"/>
+          </a:effectRef>
+          <a:fontRef idx="minor">
+            <a:schemeClr val="lt1"/>
+          </a:fontRef>
+        </p:style>
+        <p:txBody>
+          <a:bodyPr rtlCol="0" anchor="ctr"/>
+          <a:lstStyle/>
+          <a:p>
+            <a:pPr algn="ctr"/>
+            <a:endParaRPr lang="en-NZ"/>
+          </a:p>
+        </p:txBody>
+      </p:sp>
+      <p:sp>
+        <p:nvSpPr>
+          <p:cNvPr id="17" name="Rectangle 16">
+            <a:extLst>
+              <a:ext uri="{FF2B5EF4-FFF2-40B4-BE49-F238E27FC236}">
+                <a16:creationId xmlns:a16="http://schemas.microsoft.com/office/drawing/2014/main" id="{B7DDBA51-FD6B-BC73-0020-C22958B0E530}"/>
+              </a:ext>
+            </a:extLst>
+          </p:cNvPr>
+          <p:cNvSpPr/>
+          <p:nvPr/>
+        </p:nvSpPr>
+        <p:spPr>
+          <a:xfrm>
+            <a:off x="8322733" y="3208867"/>
+            <a:ext cx="2683934" cy="863600"/>
+          </a:xfrm>
+          <a:prstGeom prst="rect">
+            <a:avLst/>
+          </a:prstGeom>
+          <a:solidFill>
+            <a:schemeClr val="accent4">
+              <a:lumMod val="75000"/>
+            </a:schemeClr>
+          </a:solidFill>
+        </p:spPr>
+        <p:style>
+          <a:lnRef idx="2">
+            <a:schemeClr val="accent1">
+              <a:shade val="15000"/>
+            </a:schemeClr>
+          </a:lnRef>
+          <a:fillRef idx="1">
+            <a:schemeClr val="accent1"/>
+          </a:fillRef>
+          <a:effectRef idx="0">
+            <a:schemeClr val="accent1"/>
+          </a:effectRef>
+          <a:fontRef idx="minor">
+            <a:schemeClr val="lt1"/>
+          </a:fontRef>
+        </p:style>
+        <p:txBody>
+          <a:bodyPr rtlCol="0" anchor="ctr"/>
+          <a:lstStyle/>
+          <a:p>
+            <a:pPr algn="ctr"/>
+            <a:endParaRPr lang="en-NZ"/>
+          </a:p>
+        </p:txBody>
+      </p:sp>
+      <p:sp>
+        <p:nvSpPr>
+          <p:cNvPr id="18" name="Rectangle 17">
+            <a:extLst>
+              <a:ext uri="{FF2B5EF4-FFF2-40B4-BE49-F238E27FC236}">
+                <a16:creationId xmlns:a16="http://schemas.microsoft.com/office/drawing/2014/main" id="{33622CD1-71EF-9AF4-51FB-6E6C9D71FCAF}"/>
+              </a:ext>
+            </a:extLst>
+          </p:cNvPr>
+          <p:cNvSpPr/>
+          <p:nvPr/>
+        </p:nvSpPr>
+        <p:spPr>
+          <a:xfrm>
+            <a:off x="8322733" y="4072467"/>
+            <a:ext cx="2683934" cy="863600"/>
+          </a:xfrm>
+          <a:prstGeom prst="rect">
+            <a:avLst/>
+          </a:prstGeom>
+          <a:solidFill>
+            <a:schemeClr val="accent6">
+              <a:lumMod val="75000"/>
+            </a:schemeClr>
+          </a:solidFill>
+        </p:spPr>
+        <p:style>
+          <a:lnRef idx="2">
+            <a:schemeClr val="accent1">
+              <a:shade val="15000"/>
+            </a:schemeClr>
+          </a:lnRef>
+          <a:fillRef idx="1">
+            <a:schemeClr val="accent1"/>
+          </a:fillRef>
+          <a:effectRef idx="0">
+            <a:schemeClr val="accent1"/>
+          </a:effectRef>
+          <a:fontRef idx="minor">
+            <a:schemeClr val="lt1"/>
+          </a:fontRef>
+        </p:style>
+        <p:txBody>
+          <a:bodyPr rtlCol="0" anchor="ctr"/>
+          <a:lstStyle/>
+          <a:p>
+            <a:pPr algn="ctr"/>
+            <a:endParaRPr lang="en-NZ"/>
+          </a:p>
+        </p:txBody>
+      </p:sp>
+      <p:sp>
+        <p:nvSpPr>
+          <p:cNvPr id="19" name="Rectangle 18">
+            <a:extLst>
+              <a:ext uri="{FF2B5EF4-FFF2-40B4-BE49-F238E27FC236}">
+                <a16:creationId xmlns:a16="http://schemas.microsoft.com/office/drawing/2014/main" id="{240C5883-9F64-8638-3390-7D9B383FCC80}"/>
+              </a:ext>
+            </a:extLst>
+          </p:cNvPr>
+          <p:cNvSpPr/>
+          <p:nvPr/>
+        </p:nvSpPr>
+        <p:spPr>
+          <a:xfrm>
+            <a:off x="8322733" y="4950883"/>
+            <a:ext cx="2683934" cy="863600"/>
+          </a:xfrm>
+          <a:prstGeom prst="rect">
+            <a:avLst/>
+          </a:prstGeom>
+          <a:solidFill>
+            <a:srgbClr val="FFFF00"/>
+          </a:solidFill>
+        </p:spPr>
+        <p:style>
+          <a:lnRef idx="2">
+            <a:schemeClr val="accent1">
+              <a:shade val="15000"/>
+            </a:schemeClr>
+          </a:lnRef>
+          <a:fillRef idx="1">
+            <a:schemeClr val="accent1"/>
+          </a:fillRef>
+          <a:effectRef idx="0">
+            <a:schemeClr val="accent1"/>
+          </a:effectRef>
+          <a:fontRef idx="minor">
+            <a:schemeClr val="lt1"/>
+          </a:fontRef>
+        </p:style>
+        <p:txBody>
+          <a:bodyPr rtlCol="0" anchor="ctr"/>
+          <a:lstStyle/>
+          <a:p>
+            <a:pPr algn="ctr"/>
+            <a:endParaRPr lang="en-NZ"/>
+          </a:p>
+        </p:txBody>
+      </p:sp>
+      <p:sp>
+        <p:nvSpPr>
+          <p:cNvPr id="20" name="TextBox 19">
+            <a:extLst>
+              <a:ext uri="{FF2B5EF4-FFF2-40B4-BE49-F238E27FC236}">
+                <a16:creationId xmlns:a16="http://schemas.microsoft.com/office/drawing/2014/main" id="{0100A2E1-980D-4795-BE4E-2BF74D2831F4}"/>
+              </a:ext>
+            </a:extLst>
+          </p:cNvPr>
+          <p:cNvSpPr txBox="1"/>
+          <p:nvPr/>
+        </p:nvSpPr>
+        <p:spPr>
+          <a:xfrm>
+            <a:off x="878975" y="1320800"/>
+            <a:ext cx="150843" cy="369332"/>
+          </a:xfrm>
+          <a:prstGeom prst="rect">
+            <a:avLst/>
+          </a:prstGeom>
+          <a:noFill/>
+        </p:spPr>
+        <p:txBody>
+          <a:bodyPr wrap="square" rtlCol="0">
+            <a:spAutoFit/>
+          </a:bodyPr>
+          <a:lstStyle/>
+          <a:p>
+            <a:r>
+              <a:rPr lang="en-NZ" dirty="0"/>
+              <a:t>1</a:t>
+            </a:r>
+          </a:p>
+        </p:txBody>
+      </p:sp>
+      <p:sp>
+        <p:nvSpPr>
+          <p:cNvPr id="21" name="TextBox 20">
+            <a:extLst>
+              <a:ext uri="{FF2B5EF4-FFF2-40B4-BE49-F238E27FC236}">
+                <a16:creationId xmlns:a16="http://schemas.microsoft.com/office/drawing/2014/main" id="{2827D7CA-70E3-B91E-3133-CE821C883D4D}"/>
+              </a:ext>
+            </a:extLst>
+          </p:cNvPr>
+          <p:cNvSpPr txBox="1"/>
+          <p:nvPr/>
+        </p:nvSpPr>
+        <p:spPr>
+          <a:xfrm>
+            <a:off x="843550" y="5661052"/>
+            <a:ext cx="333746" cy="369332"/>
+          </a:xfrm>
+          <a:prstGeom prst="rect">
+            <a:avLst/>
+          </a:prstGeom>
+          <a:noFill/>
+        </p:spPr>
+        <p:txBody>
+          <a:bodyPr wrap="none" rtlCol="0">
+            <a:spAutoFit/>
+          </a:bodyPr>
+          <a:lstStyle/>
+          <a:p>
+            <a:r>
+              <a:rPr lang="en-NZ" i="1" dirty="0"/>
+              <a:t>N</a:t>
+            </a:r>
+          </a:p>
+        </p:txBody>
+      </p:sp>
+      <p:sp>
+        <p:nvSpPr>
+          <p:cNvPr id="22" name="TextBox 21">
+            <a:extLst>
+              <a:ext uri="{FF2B5EF4-FFF2-40B4-BE49-F238E27FC236}">
+                <a16:creationId xmlns:a16="http://schemas.microsoft.com/office/drawing/2014/main" id="{BB1B7B56-B2DD-BFA3-21C0-F07FC8864258}"/>
+              </a:ext>
+            </a:extLst>
+          </p:cNvPr>
+          <p:cNvSpPr txBox="1"/>
+          <p:nvPr/>
+        </p:nvSpPr>
+        <p:spPr>
+          <a:xfrm>
+            <a:off x="8007909" y="1320800"/>
+            <a:ext cx="150843" cy="369332"/>
+          </a:xfrm>
+          <a:prstGeom prst="rect">
+            <a:avLst/>
+          </a:prstGeom>
+          <a:noFill/>
+        </p:spPr>
+        <p:txBody>
+          <a:bodyPr wrap="square" rtlCol="0">
+            <a:spAutoFit/>
+          </a:bodyPr>
+          <a:lstStyle/>
+          <a:p>
+            <a:r>
+              <a:rPr lang="en-NZ" dirty="0"/>
+              <a:t>1</a:t>
+            </a:r>
+          </a:p>
+        </p:txBody>
+      </p:sp>
+      <p:sp>
+        <p:nvSpPr>
+          <p:cNvPr id="23" name="TextBox 22">
+            <a:extLst>
+              <a:ext uri="{FF2B5EF4-FFF2-40B4-BE49-F238E27FC236}">
+                <a16:creationId xmlns:a16="http://schemas.microsoft.com/office/drawing/2014/main" id="{5DFF4747-79C9-ECDC-05DF-AB5E6A756DB8}"/>
+              </a:ext>
+            </a:extLst>
+          </p:cNvPr>
+          <p:cNvSpPr txBox="1"/>
+          <p:nvPr/>
+        </p:nvSpPr>
+        <p:spPr>
+          <a:xfrm>
+            <a:off x="4358776" y="2954866"/>
+            <a:ext cx="150843" cy="369332"/>
+          </a:xfrm>
+          <a:prstGeom prst="rect">
+            <a:avLst/>
+          </a:prstGeom>
+          <a:noFill/>
+        </p:spPr>
+        <p:txBody>
+          <a:bodyPr wrap="square" rtlCol="0">
+            <a:spAutoFit/>
+          </a:bodyPr>
+          <a:lstStyle/>
+          <a:p>
+            <a:r>
+              <a:rPr lang="en-NZ" dirty="0"/>
+              <a:t>1</a:t>
+            </a:r>
+          </a:p>
+        </p:txBody>
+      </p:sp>
+      <p:sp>
+        <p:nvSpPr>
+          <p:cNvPr id="24" name="TextBox 23">
+            <a:extLst>
+              <a:ext uri="{FF2B5EF4-FFF2-40B4-BE49-F238E27FC236}">
+                <a16:creationId xmlns:a16="http://schemas.microsoft.com/office/drawing/2014/main" id="{6B8DA95E-9B8F-06C6-E84D-37E6B9A19B75}"/>
+              </a:ext>
+            </a:extLst>
+          </p:cNvPr>
+          <p:cNvSpPr txBox="1"/>
+          <p:nvPr/>
+        </p:nvSpPr>
+        <p:spPr>
+          <a:xfrm>
+            <a:off x="4358775" y="3640667"/>
+            <a:ext cx="150843" cy="369332"/>
+          </a:xfrm>
+          <a:prstGeom prst="rect">
+            <a:avLst/>
+          </a:prstGeom>
+          <a:noFill/>
+        </p:spPr>
+        <p:txBody>
+          <a:bodyPr wrap="square" rtlCol="0">
+            <a:spAutoFit/>
+          </a:bodyPr>
+          <a:lstStyle/>
+          <a:p>
+            <a:r>
+              <a:rPr lang="en-NZ" i="1" dirty="0"/>
+              <a:t>n</a:t>
+            </a:r>
+          </a:p>
+        </p:txBody>
+      </p:sp>
+      <p:sp>
+        <p:nvSpPr>
+          <p:cNvPr id="25" name="TextBox 24">
+            <a:extLst>
+              <a:ext uri="{FF2B5EF4-FFF2-40B4-BE49-F238E27FC236}">
+                <a16:creationId xmlns:a16="http://schemas.microsoft.com/office/drawing/2014/main" id="{C3780D90-E6C0-165D-A9FF-E4335BB52409}"/>
+              </a:ext>
+            </a:extLst>
+          </p:cNvPr>
+          <p:cNvSpPr txBox="1"/>
+          <p:nvPr/>
+        </p:nvSpPr>
+        <p:spPr>
+          <a:xfrm>
+            <a:off x="7916457" y="5629817"/>
+            <a:ext cx="333746" cy="369332"/>
+          </a:xfrm>
+          <a:prstGeom prst="rect">
+            <a:avLst/>
+          </a:prstGeom>
+          <a:noFill/>
+        </p:spPr>
+        <p:txBody>
+          <a:bodyPr wrap="square" rtlCol="0">
+            <a:spAutoFit/>
+          </a:bodyPr>
+          <a:lstStyle/>
+          <a:p>
+            <a:r>
+              <a:rPr lang="en-NZ" dirty="0"/>
+              <a:t>N</a:t>
+            </a:r>
+          </a:p>
+        </p:txBody>
+      </p:sp>
+      <p:sp>
+        <p:nvSpPr>
+          <p:cNvPr id="26" name="TextBox 25">
+            <a:extLst>
+              <a:ext uri="{FF2B5EF4-FFF2-40B4-BE49-F238E27FC236}">
+                <a16:creationId xmlns:a16="http://schemas.microsoft.com/office/drawing/2014/main" id="{3EC81441-9A4C-C710-3130-337BB85380C6}"/>
+              </a:ext>
+            </a:extLst>
+          </p:cNvPr>
+          <p:cNvSpPr txBox="1"/>
+          <p:nvPr/>
+        </p:nvSpPr>
+        <p:spPr>
+          <a:xfrm>
+            <a:off x="1453696" y="996434"/>
+            <a:ext cx="2043445" cy="369332"/>
+          </a:xfrm>
+          <a:prstGeom prst="rect">
+            <a:avLst/>
+          </a:prstGeom>
+          <a:noFill/>
+        </p:spPr>
+        <p:txBody>
+          <a:bodyPr wrap="none" rtlCol="0">
+            <a:spAutoFit/>
+          </a:bodyPr>
+          <a:lstStyle/>
+          <a:p>
+            <a:r>
+              <a:rPr lang="en-NZ" dirty="0"/>
+              <a:t>Population of size </a:t>
+            </a:r>
+            <a:r>
+              <a:rPr lang="en-NZ" i="1" dirty="0"/>
+              <a:t>N</a:t>
+            </a:r>
+          </a:p>
+        </p:txBody>
+      </p:sp>
+      <p:sp>
+        <p:nvSpPr>
+          <p:cNvPr id="27" name="TextBox 26">
+            <a:extLst>
+              <a:ext uri="{FF2B5EF4-FFF2-40B4-BE49-F238E27FC236}">
+                <a16:creationId xmlns:a16="http://schemas.microsoft.com/office/drawing/2014/main" id="{23DBCF73-BB81-F01D-3721-D2135F642D22}"/>
+              </a:ext>
+            </a:extLst>
+          </p:cNvPr>
+          <p:cNvSpPr txBox="1"/>
+          <p:nvPr/>
+        </p:nvSpPr>
+        <p:spPr>
+          <a:xfrm>
+            <a:off x="5249646" y="2604069"/>
+            <a:ext cx="1692707" cy="369332"/>
+          </a:xfrm>
+          <a:prstGeom prst="rect">
+            <a:avLst/>
+          </a:prstGeom>
+          <a:noFill/>
+        </p:spPr>
+        <p:txBody>
+          <a:bodyPr wrap="none" rtlCol="0">
+            <a:spAutoFit/>
+          </a:bodyPr>
+          <a:lstStyle/>
+          <a:p>
+            <a:r>
+              <a:rPr lang="en-NZ" dirty="0"/>
+              <a:t>Sample of size </a:t>
+            </a:r>
+            <a:r>
+              <a:rPr lang="en-NZ" i="1" dirty="0"/>
+              <a:t>n</a:t>
+            </a:r>
+          </a:p>
+        </p:txBody>
+      </p:sp>
+      <p:sp>
+        <p:nvSpPr>
+          <p:cNvPr id="28" name="TextBox 27">
+            <a:extLst>
+              <a:ext uri="{FF2B5EF4-FFF2-40B4-BE49-F238E27FC236}">
+                <a16:creationId xmlns:a16="http://schemas.microsoft.com/office/drawing/2014/main" id="{2BC5B993-3A78-C7AC-2F2E-CCFF08D93CBA}"/>
+              </a:ext>
+            </a:extLst>
+          </p:cNvPr>
+          <p:cNvSpPr txBox="1"/>
+          <p:nvPr/>
+        </p:nvSpPr>
+        <p:spPr>
+          <a:xfrm>
+            <a:off x="8182787" y="996434"/>
+            <a:ext cx="2963825" cy="369332"/>
+          </a:xfrm>
+          <a:prstGeom prst="rect">
+            <a:avLst/>
+          </a:prstGeom>
+          <a:noFill/>
+        </p:spPr>
+        <p:txBody>
+          <a:bodyPr wrap="none" rtlCol="0">
+            <a:spAutoFit/>
+          </a:bodyPr>
+          <a:lstStyle/>
+          <a:p>
+            <a:r>
+              <a:rPr lang="en-NZ" dirty="0"/>
+              <a:t>Synthetic Population of size </a:t>
+            </a:r>
+            <a:r>
+              <a:rPr lang="en-NZ" i="1" dirty="0"/>
+              <a:t>N</a:t>
+            </a:r>
+          </a:p>
+        </p:txBody>
+      </p:sp>
+      <p:cxnSp>
+        <p:nvCxnSpPr>
+          <p:cNvPr id="30" name="Straight Arrow Connector 29">
+            <a:extLst>
+              <a:ext uri="{FF2B5EF4-FFF2-40B4-BE49-F238E27FC236}">
+                <a16:creationId xmlns:a16="http://schemas.microsoft.com/office/drawing/2014/main" id="{C6B85A32-3CDE-A6C3-FB11-271E00B9711F}"/>
+              </a:ext>
+            </a:extLst>
+          </p:cNvPr>
+          <p:cNvCxnSpPr>
+            <a:stCxn id="3" idx="3"/>
+            <a:endCxn id="9" idx="1"/>
+          </p:cNvCxnSpPr>
+          <p:nvPr/>
+        </p:nvCxnSpPr>
+        <p:spPr>
+          <a:xfrm>
+            <a:off x="3869267" y="2065867"/>
+            <a:ext cx="884766" cy="1092200"/>
+          </a:xfrm>
+          <a:prstGeom prst="straightConnector1">
+            <a:avLst/>
+          </a:prstGeom>
+          <a:ln w="28575">
+            <a:tailEnd type="triangle"/>
+          </a:ln>
+        </p:spPr>
+        <p:style>
+          <a:lnRef idx="1">
+            <a:schemeClr val="accent1"/>
+          </a:lnRef>
+          <a:fillRef idx="0">
+            <a:schemeClr val="accent1"/>
+          </a:fillRef>
+          <a:effectRef idx="0">
+            <a:schemeClr val="accent1"/>
+          </a:effectRef>
+          <a:fontRef idx="minor">
+            <a:schemeClr val="tx1"/>
+          </a:fontRef>
+        </p:style>
+      </p:cxnSp>
+      <p:cxnSp>
+        <p:nvCxnSpPr>
+          <p:cNvPr id="31" name="Straight Arrow Connector 30">
+            <a:extLst>
+              <a:ext uri="{FF2B5EF4-FFF2-40B4-BE49-F238E27FC236}">
+                <a16:creationId xmlns:a16="http://schemas.microsoft.com/office/drawing/2014/main" id="{857949A0-ECB6-E79D-9718-CB1CD9D1662A}"/>
+              </a:ext>
+            </a:extLst>
+          </p:cNvPr>
+          <p:cNvCxnSpPr>
+            <a:cxnSpLocks/>
+            <a:endCxn id="12" idx="1"/>
+          </p:cNvCxnSpPr>
+          <p:nvPr/>
+        </p:nvCxnSpPr>
+        <p:spPr>
+          <a:xfrm>
+            <a:off x="3861230" y="3139532"/>
+            <a:ext cx="892803" cy="424935"/>
+          </a:xfrm>
+          <a:prstGeom prst="straightConnector1">
+            <a:avLst/>
+          </a:prstGeom>
+          <a:ln w="28575">
+            <a:tailEnd type="triangle"/>
+          </a:ln>
+        </p:spPr>
+        <p:style>
+          <a:lnRef idx="1">
+            <a:schemeClr val="accent1"/>
+          </a:lnRef>
+          <a:fillRef idx="0">
+            <a:schemeClr val="accent1"/>
+          </a:fillRef>
+          <a:effectRef idx="0">
+            <a:schemeClr val="accent1"/>
+          </a:effectRef>
+          <a:fontRef idx="minor">
+            <a:schemeClr val="tx1"/>
+          </a:fontRef>
+        </p:style>
+      </p:cxnSp>
+      <p:cxnSp>
+        <p:nvCxnSpPr>
+          <p:cNvPr id="32" name="Straight Arrow Connector 31">
+            <a:extLst>
+              <a:ext uri="{FF2B5EF4-FFF2-40B4-BE49-F238E27FC236}">
+                <a16:creationId xmlns:a16="http://schemas.microsoft.com/office/drawing/2014/main" id="{4B625E0B-DC7A-C97F-94B9-17BA49C00B18}"/>
+              </a:ext>
+            </a:extLst>
+          </p:cNvPr>
+          <p:cNvCxnSpPr>
+            <a:cxnSpLocks/>
+            <a:endCxn id="11" idx="1"/>
+          </p:cNvCxnSpPr>
+          <p:nvPr/>
+        </p:nvCxnSpPr>
+        <p:spPr>
+          <a:xfrm>
+            <a:off x="3877304" y="3022600"/>
+            <a:ext cx="876729" cy="406400"/>
+          </a:xfrm>
+          <a:prstGeom prst="straightConnector1">
+            <a:avLst/>
+          </a:prstGeom>
+          <a:ln w="28575">
+            <a:tailEnd type="triangle"/>
+          </a:ln>
+        </p:spPr>
+        <p:style>
+          <a:lnRef idx="1">
+            <a:schemeClr val="accent1"/>
+          </a:lnRef>
+          <a:fillRef idx="0">
+            <a:schemeClr val="accent1"/>
+          </a:fillRef>
+          <a:effectRef idx="0">
+            <a:schemeClr val="accent1"/>
+          </a:effectRef>
+          <a:fontRef idx="minor">
+            <a:schemeClr val="tx1"/>
+          </a:fontRef>
+        </p:style>
+      </p:cxnSp>
+      <p:cxnSp>
+        <p:nvCxnSpPr>
+          <p:cNvPr id="33" name="Straight Arrow Connector 32">
+            <a:extLst>
+              <a:ext uri="{FF2B5EF4-FFF2-40B4-BE49-F238E27FC236}">
+                <a16:creationId xmlns:a16="http://schemas.microsoft.com/office/drawing/2014/main" id="{AA71AF4C-B9D7-C431-B8C1-6475F97B3E34}"/>
+              </a:ext>
+            </a:extLst>
+          </p:cNvPr>
+          <p:cNvCxnSpPr>
+            <a:cxnSpLocks/>
+            <a:endCxn id="10" idx="1"/>
+          </p:cNvCxnSpPr>
+          <p:nvPr/>
+        </p:nvCxnSpPr>
+        <p:spPr>
+          <a:xfrm>
+            <a:off x="3869264" y="2490517"/>
+            <a:ext cx="884769" cy="803017"/>
+          </a:xfrm>
+          <a:prstGeom prst="straightConnector1">
+            <a:avLst/>
+          </a:prstGeom>
+          <a:ln w="28575">
+            <a:tailEnd type="triangle"/>
+          </a:ln>
+        </p:spPr>
+        <p:style>
+          <a:lnRef idx="1">
+            <a:schemeClr val="accent1"/>
+          </a:lnRef>
+          <a:fillRef idx="0">
+            <a:schemeClr val="accent1"/>
+          </a:fillRef>
+          <a:effectRef idx="0">
+            <a:schemeClr val="accent1"/>
+          </a:effectRef>
+          <a:fontRef idx="minor">
+            <a:schemeClr val="tx1"/>
+          </a:fontRef>
+        </p:style>
+      </p:cxnSp>
+      <p:cxnSp>
+        <p:nvCxnSpPr>
+          <p:cNvPr id="34" name="Straight Arrow Connector 33">
+            <a:extLst>
+              <a:ext uri="{FF2B5EF4-FFF2-40B4-BE49-F238E27FC236}">
+                <a16:creationId xmlns:a16="http://schemas.microsoft.com/office/drawing/2014/main" id="{C565EE20-D945-616A-6158-AE46B24415FA}"/>
+              </a:ext>
+            </a:extLst>
+          </p:cNvPr>
+          <p:cNvCxnSpPr>
+            <a:cxnSpLocks/>
+            <a:stCxn id="7" idx="3"/>
+            <a:endCxn id="14" idx="1"/>
+          </p:cNvCxnSpPr>
+          <p:nvPr/>
+        </p:nvCxnSpPr>
+        <p:spPr>
+          <a:xfrm flipV="1">
+            <a:off x="3869267" y="3835400"/>
+            <a:ext cx="884766" cy="1608667"/>
+          </a:xfrm>
+          <a:prstGeom prst="straightConnector1">
+            <a:avLst/>
+          </a:prstGeom>
+          <a:ln w="28575">
+            <a:tailEnd type="triangle"/>
+          </a:ln>
+        </p:spPr>
+        <p:style>
+          <a:lnRef idx="1">
+            <a:schemeClr val="accent1"/>
+          </a:lnRef>
+          <a:fillRef idx="0">
+            <a:schemeClr val="accent1"/>
+          </a:fillRef>
+          <a:effectRef idx="0">
+            <a:schemeClr val="accent1"/>
+          </a:effectRef>
+          <a:fontRef idx="minor">
+            <a:schemeClr val="tx1"/>
+          </a:fontRef>
+        </p:style>
+      </p:cxnSp>
+      <p:cxnSp>
+        <p:nvCxnSpPr>
+          <p:cNvPr id="40" name="Straight Arrow Connector 39">
+            <a:extLst>
+              <a:ext uri="{FF2B5EF4-FFF2-40B4-BE49-F238E27FC236}">
+                <a16:creationId xmlns:a16="http://schemas.microsoft.com/office/drawing/2014/main" id="{495D1EC7-B1B2-225D-65E5-4CDF745A5852}"/>
+              </a:ext>
+            </a:extLst>
+          </p:cNvPr>
+          <p:cNvCxnSpPr>
+            <a:cxnSpLocks/>
+            <a:stCxn id="6" idx="3"/>
+            <a:endCxn id="13" idx="1"/>
+          </p:cNvCxnSpPr>
+          <p:nvPr/>
+        </p:nvCxnSpPr>
+        <p:spPr>
+          <a:xfrm flipV="1">
+            <a:off x="3869267" y="3699933"/>
+            <a:ext cx="884766" cy="347134"/>
+          </a:xfrm>
+          <a:prstGeom prst="straightConnector1">
+            <a:avLst/>
+          </a:prstGeom>
+          <a:ln w="28575">
+            <a:tailEnd type="triangle"/>
+          </a:ln>
+        </p:spPr>
+        <p:style>
+          <a:lnRef idx="1">
+            <a:schemeClr val="accent1"/>
+          </a:lnRef>
+          <a:fillRef idx="0">
+            <a:schemeClr val="accent1"/>
+          </a:fillRef>
+          <a:effectRef idx="0">
+            <a:schemeClr val="accent1"/>
+          </a:effectRef>
+          <a:fontRef idx="minor">
+            <a:schemeClr val="tx1"/>
+          </a:fontRef>
+        </p:style>
+      </p:cxnSp>
+      <p:cxnSp>
+        <p:nvCxnSpPr>
+          <p:cNvPr id="43" name="Straight Arrow Connector 42">
+            <a:extLst>
+              <a:ext uri="{FF2B5EF4-FFF2-40B4-BE49-F238E27FC236}">
+                <a16:creationId xmlns:a16="http://schemas.microsoft.com/office/drawing/2014/main" id="{9E00F7C4-8FB8-214D-083B-5C147FEEF037}"/>
+              </a:ext>
+            </a:extLst>
+          </p:cNvPr>
+          <p:cNvCxnSpPr>
+            <a:cxnSpLocks/>
+          </p:cNvCxnSpPr>
+          <p:nvPr/>
+        </p:nvCxnSpPr>
+        <p:spPr>
+          <a:xfrm flipV="1">
+            <a:off x="7429930" y="3289300"/>
+            <a:ext cx="884766" cy="135466"/>
+          </a:xfrm>
+          <a:prstGeom prst="straightConnector1">
+            <a:avLst/>
+          </a:prstGeom>
+          <a:ln w="28575">
+            <a:tailEnd type="triangle"/>
+          </a:ln>
+        </p:spPr>
+        <p:style>
+          <a:lnRef idx="1">
+            <a:schemeClr val="accent1"/>
+          </a:lnRef>
+          <a:fillRef idx="0">
+            <a:schemeClr val="accent1"/>
+          </a:fillRef>
+          <a:effectRef idx="0">
+            <a:schemeClr val="accent1"/>
+          </a:effectRef>
+          <a:fontRef idx="minor">
+            <a:schemeClr val="tx1"/>
+          </a:fontRef>
+        </p:style>
+      </p:cxnSp>
+      <p:cxnSp>
+        <p:nvCxnSpPr>
+          <p:cNvPr id="45" name="Straight Arrow Connector 44">
+            <a:extLst>
+              <a:ext uri="{FF2B5EF4-FFF2-40B4-BE49-F238E27FC236}">
+                <a16:creationId xmlns:a16="http://schemas.microsoft.com/office/drawing/2014/main" id="{173C5429-6159-D6A2-FA1D-62C2B8A4F971}"/>
+              </a:ext>
+            </a:extLst>
+          </p:cNvPr>
+          <p:cNvCxnSpPr>
+            <a:cxnSpLocks/>
+          </p:cNvCxnSpPr>
+          <p:nvPr/>
+        </p:nvCxnSpPr>
+        <p:spPr>
+          <a:xfrm flipV="1">
+            <a:off x="7446004" y="3424766"/>
+            <a:ext cx="868692" cy="16934"/>
+          </a:xfrm>
+          <a:prstGeom prst="straightConnector1">
+            <a:avLst/>
+          </a:prstGeom>
+          <a:ln w="28575">
+            <a:tailEnd type="triangle"/>
+          </a:ln>
+        </p:spPr>
+        <p:style>
+          <a:lnRef idx="1">
+            <a:schemeClr val="accent1"/>
+          </a:lnRef>
+          <a:fillRef idx="0">
+            <a:schemeClr val="accent1"/>
+          </a:fillRef>
+          <a:effectRef idx="0">
+            <a:schemeClr val="accent1"/>
+          </a:effectRef>
+          <a:fontRef idx="minor">
+            <a:schemeClr val="tx1"/>
+          </a:fontRef>
+        </p:style>
+      </p:cxnSp>
+      <p:cxnSp>
+        <p:nvCxnSpPr>
+          <p:cNvPr id="46" name="Straight Arrow Connector 45">
+            <a:extLst>
+              <a:ext uri="{FF2B5EF4-FFF2-40B4-BE49-F238E27FC236}">
+                <a16:creationId xmlns:a16="http://schemas.microsoft.com/office/drawing/2014/main" id="{89DC42AA-DEDB-A877-9949-C016B7E1DBD4}"/>
+              </a:ext>
+            </a:extLst>
+          </p:cNvPr>
+          <p:cNvCxnSpPr>
+            <a:cxnSpLocks/>
+            <a:stCxn id="11" idx="3"/>
+          </p:cNvCxnSpPr>
+          <p:nvPr/>
+        </p:nvCxnSpPr>
+        <p:spPr>
+          <a:xfrm>
+            <a:off x="7437967" y="3429000"/>
+            <a:ext cx="876729" cy="101599"/>
+          </a:xfrm>
+          <a:prstGeom prst="straightConnector1">
+            <a:avLst/>
+          </a:prstGeom>
+          <a:ln w="28575">
+            <a:tailEnd type="triangle"/>
+          </a:ln>
+        </p:spPr>
+        <p:style>
+          <a:lnRef idx="1">
+            <a:schemeClr val="accent1"/>
+          </a:lnRef>
+          <a:fillRef idx="0">
+            <a:schemeClr val="accent1"/>
+          </a:fillRef>
+          <a:effectRef idx="0">
+            <a:schemeClr val="accent1"/>
+          </a:effectRef>
+          <a:fontRef idx="minor">
+            <a:schemeClr val="tx1"/>
+          </a:fontRef>
+        </p:style>
+      </p:cxnSp>
+      <p:cxnSp>
+        <p:nvCxnSpPr>
+          <p:cNvPr id="47" name="Straight Arrow Connector 46">
+            <a:extLst>
+              <a:ext uri="{FF2B5EF4-FFF2-40B4-BE49-F238E27FC236}">
+                <a16:creationId xmlns:a16="http://schemas.microsoft.com/office/drawing/2014/main" id="{5BF73DEB-34C7-FE32-20B7-7B22E840A48C}"/>
+              </a:ext>
+            </a:extLst>
+          </p:cNvPr>
+          <p:cNvCxnSpPr>
+            <a:cxnSpLocks/>
+            <a:endCxn id="17" idx="1"/>
+          </p:cNvCxnSpPr>
+          <p:nvPr/>
+        </p:nvCxnSpPr>
+        <p:spPr>
+          <a:xfrm>
+            <a:off x="7446004" y="3441700"/>
+            <a:ext cx="876729" cy="198967"/>
+          </a:xfrm>
+          <a:prstGeom prst="straightConnector1">
+            <a:avLst/>
+          </a:prstGeom>
+          <a:ln w="28575">
+            <a:tailEnd type="triangle"/>
+          </a:ln>
+        </p:spPr>
+        <p:style>
+          <a:lnRef idx="1">
+            <a:schemeClr val="accent1"/>
+          </a:lnRef>
+          <a:fillRef idx="0">
+            <a:schemeClr val="accent1"/>
+          </a:fillRef>
+          <a:effectRef idx="0">
+            <a:schemeClr val="accent1"/>
+          </a:effectRef>
+          <a:fontRef idx="minor">
+            <a:schemeClr val="tx1"/>
+          </a:fontRef>
+        </p:style>
+      </p:cxnSp>
+      <p:cxnSp>
+        <p:nvCxnSpPr>
+          <p:cNvPr id="48" name="Straight Arrow Connector 47">
+            <a:extLst>
+              <a:ext uri="{FF2B5EF4-FFF2-40B4-BE49-F238E27FC236}">
+                <a16:creationId xmlns:a16="http://schemas.microsoft.com/office/drawing/2014/main" id="{7E6A2818-1CC8-16E2-FB05-CE6B3721648B}"/>
+              </a:ext>
+            </a:extLst>
+          </p:cNvPr>
+          <p:cNvCxnSpPr>
+            <a:cxnSpLocks/>
+          </p:cNvCxnSpPr>
+          <p:nvPr/>
+        </p:nvCxnSpPr>
+        <p:spPr>
+          <a:xfrm>
+            <a:off x="7446004" y="3441700"/>
+            <a:ext cx="868692" cy="325966"/>
+          </a:xfrm>
+          <a:prstGeom prst="straightConnector1">
+            <a:avLst/>
+          </a:prstGeom>
+          <a:ln w="28575">
+            <a:tailEnd type="triangle"/>
+          </a:ln>
+        </p:spPr>
+        <p:style>
+          <a:lnRef idx="1">
+            <a:schemeClr val="accent1"/>
+          </a:lnRef>
+          <a:fillRef idx="0">
+            <a:schemeClr val="accent1"/>
+          </a:fillRef>
+          <a:effectRef idx="0">
+            <a:schemeClr val="accent1"/>
+          </a:effectRef>
+          <a:fontRef idx="minor">
+            <a:schemeClr val="tx1"/>
+          </a:fontRef>
+        </p:style>
+      </p:cxnSp>
+      <p:cxnSp>
+        <p:nvCxnSpPr>
+          <p:cNvPr id="57" name="Straight Arrow Connector 56">
+            <a:extLst>
+              <a:ext uri="{FF2B5EF4-FFF2-40B4-BE49-F238E27FC236}">
+                <a16:creationId xmlns:a16="http://schemas.microsoft.com/office/drawing/2014/main" id="{DEDD5C43-3FB3-4BD8-900E-B2A60DCA60DB}"/>
+              </a:ext>
+            </a:extLst>
+          </p:cNvPr>
+          <p:cNvCxnSpPr>
+            <a:cxnSpLocks/>
+            <a:stCxn id="11" idx="3"/>
+          </p:cNvCxnSpPr>
+          <p:nvPr/>
+        </p:nvCxnSpPr>
+        <p:spPr>
+          <a:xfrm>
+            <a:off x="7437967" y="3429000"/>
+            <a:ext cx="876729" cy="442384"/>
+          </a:xfrm>
+          <a:prstGeom prst="straightConnector1">
+            <a:avLst/>
+          </a:prstGeom>
+          <a:ln w="28575">
+            <a:tailEnd type="triangle"/>
+          </a:ln>
+        </p:spPr>
+        <p:style>
+          <a:lnRef idx="1">
+            <a:schemeClr val="accent1"/>
+          </a:lnRef>
+          <a:fillRef idx="0">
+            <a:schemeClr val="accent1"/>
+          </a:fillRef>
+          <a:effectRef idx="0">
+            <a:schemeClr val="accent1"/>
+          </a:effectRef>
+          <a:fontRef idx="minor">
+            <a:schemeClr val="tx1"/>
+          </a:fontRef>
+        </p:style>
+      </p:cxnSp>
+      <p:cxnSp>
+        <p:nvCxnSpPr>
+          <p:cNvPr id="60" name="Straight Arrow Connector 59">
+            <a:extLst>
+              <a:ext uri="{FF2B5EF4-FFF2-40B4-BE49-F238E27FC236}">
+                <a16:creationId xmlns:a16="http://schemas.microsoft.com/office/drawing/2014/main" id="{E08FB188-A3E8-9C54-BE15-FC28A68CD897}"/>
+              </a:ext>
+            </a:extLst>
+          </p:cNvPr>
+          <p:cNvCxnSpPr>
+            <a:cxnSpLocks/>
+            <a:stCxn id="11" idx="3"/>
+          </p:cNvCxnSpPr>
+          <p:nvPr/>
+        </p:nvCxnSpPr>
+        <p:spPr>
+          <a:xfrm>
+            <a:off x="7437967" y="3429000"/>
+            <a:ext cx="899585" cy="580999"/>
+          </a:xfrm>
+          <a:prstGeom prst="straightConnector1">
+            <a:avLst/>
+          </a:prstGeom>
+          <a:ln w="28575">
+            <a:tailEnd type="triangle"/>
+          </a:ln>
+        </p:spPr>
+        <p:style>
+          <a:lnRef idx="1">
+            <a:schemeClr val="accent1"/>
+          </a:lnRef>
+          <a:fillRef idx="0">
+            <a:schemeClr val="accent1"/>
+          </a:fillRef>
+          <a:effectRef idx="0">
+            <a:schemeClr val="accent1"/>
+          </a:effectRef>
+          <a:fontRef idx="minor">
+            <a:schemeClr val="tx1"/>
+          </a:fontRef>
+        </p:style>
+      </p:cxnSp>
+      <mc:AlternateContent xmlns:mc="http://schemas.openxmlformats.org/markup-compatibility/2006">
+        <mc:Choice xmlns:a14="http://schemas.microsoft.com/office/drawing/2010/main" Requires="a14">
+          <p:sp>
+            <p:nvSpPr>
+              <p:cNvPr id="64" name="TextBox 63">
+                <a:extLst>
+                  <a:ext uri="{FF2B5EF4-FFF2-40B4-BE49-F238E27FC236}">
+                    <a16:creationId xmlns:a16="http://schemas.microsoft.com/office/drawing/2014/main" id="{C4423BE6-6272-D8E5-F4B5-C9829D19696A}"/>
+                  </a:ext>
+                </a:extLst>
+              </p:cNvPr>
+              <p:cNvSpPr txBox="1"/>
+              <p:nvPr/>
+            </p:nvSpPr>
+            <p:spPr>
+              <a:xfrm>
+                <a:off x="6444821" y="4006850"/>
+                <a:ext cx="1713931" cy="1039644"/>
+              </a:xfrm>
+              <a:prstGeom prst="rect">
+                <a:avLst/>
+              </a:prstGeom>
+              <a:noFill/>
+            </p:spPr>
+            <p:txBody>
+              <a:bodyPr wrap="none" rtlCol="0">
+                <a:spAutoFit/>
+              </a:bodyPr>
+              <a:lstStyle/>
+              <a:p>
+                <a:pPr algn="ctr"/>
+                <a:r>
+                  <a:rPr lang="en-NZ" dirty="0"/>
+                  <a:t>Replicate each</a:t>
+                </a:r>
+              </a:p>
+              <a:p>
+                <a:pPr algn="ctr"/>
+                <a:r>
+                  <a:rPr lang="en-NZ" dirty="0"/>
+                  <a:t>sample member</a:t>
+                </a:r>
+              </a:p>
+              <a:p>
+                <a:pPr algn="ctr"/>
+                <a14:m>
+                  <m:oMath xmlns:m="http://schemas.openxmlformats.org/officeDocument/2006/math">
+                    <m:r>
+                      <a:rPr lang="en-NZ" b="0" i="1" smtClean="0">
+                        <a:latin typeface="Cambria Math" panose="02040503050406030204" pitchFamily="18" charset="0"/>
+                      </a:rPr>
+                      <m:t>𝑤</m:t>
+                    </m:r>
+                    <m:r>
+                      <a:rPr lang="en-NZ" b="0" i="1" smtClean="0">
+                        <a:latin typeface="Cambria Math" panose="02040503050406030204" pitchFamily="18" charset="0"/>
+                      </a:rPr>
+                      <m:t>=</m:t>
+                    </m:r>
+                    <m:f>
+                      <m:fPr>
+                        <m:ctrlPr>
+                          <a:rPr lang="en-NZ" b="0" i="1" smtClean="0">
+                            <a:latin typeface="Cambria Math" panose="02040503050406030204" pitchFamily="18" charset="0"/>
+                          </a:rPr>
+                        </m:ctrlPr>
+                      </m:fPr>
+                      <m:num>
+                        <m:r>
+                          <a:rPr lang="en-NZ" b="0" i="1" smtClean="0">
+                            <a:latin typeface="Cambria Math" panose="02040503050406030204" pitchFamily="18" charset="0"/>
+                          </a:rPr>
+                          <m:t>𝑁</m:t>
+                        </m:r>
+                      </m:num>
+                      <m:den>
+                        <m:r>
+                          <a:rPr lang="en-NZ" b="0" i="1" smtClean="0">
+                            <a:latin typeface="Cambria Math" panose="02040503050406030204" pitchFamily="18" charset="0"/>
+                          </a:rPr>
+                          <m:t>𝑛</m:t>
+                        </m:r>
+                      </m:den>
+                    </m:f>
+                  </m:oMath>
+                </a14:m>
+                <a:r>
+                  <a:rPr lang="en-NZ" dirty="0"/>
+                  <a:t> times</a:t>
+                </a:r>
+              </a:p>
+            </p:txBody>
+          </p:sp>
+        </mc:Choice>
+        <mc:Fallback>
+          <p:sp>
+            <p:nvSpPr>
+              <p:cNvPr id="64" name="TextBox 63">
+                <a:extLst>
+                  <a:ext uri="{FF2B5EF4-FFF2-40B4-BE49-F238E27FC236}">
+                    <a16:creationId xmlns:a16="http://schemas.microsoft.com/office/drawing/2014/main" id="{C4423BE6-6272-D8E5-F4B5-C9829D19696A}"/>
+                  </a:ext>
+                </a:extLst>
+              </p:cNvPr>
+              <p:cNvSpPr txBox="1">
+                <a:spLocks noRot="1" noChangeAspect="1" noMove="1" noResize="1" noEditPoints="1" noAdjustHandles="1" noChangeArrowheads="1" noChangeShapeType="1" noTextEdit="1"/>
+              </p:cNvSpPr>
+              <p:nvPr/>
+            </p:nvSpPr>
+            <p:spPr>
+              <a:xfrm>
+                <a:off x="6444821" y="4006850"/>
+                <a:ext cx="1713931" cy="1039644"/>
+              </a:xfrm>
+              <a:prstGeom prst="rect">
+                <a:avLst/>
+              </a:prstGeom>
+              <a:blipFill>
+                <a:blip r:embed="rId2"/>
+                <a:stretch>
+                  <a:fillRect l="-2491" t="-2924" r="-2847" b="-2924"/>
+                </a:stretch>
+              </a:blipFill>
+            </p:spPr>
+            <p:txBody>
+              <a:bodyPr/>
+              <a:lstStyle/>
+              <a:p>
+                <a:r>
+                  <a:rPr lang="en-NZ">
+                    <a:noFill/>
+                  </a:rPr>
+                  <a:t> </a:t>
+                </a:r>
+              </a:p>
+            </p:txBody>
+          </p:sp>
+        </mc:Fallback>
+      </mc:AlternateContent>
+    </p:spTree>
+    <p:extLst>
+      <p:ext uri="{BB962C8B-B14F-4D97-AF65-F5344CB8AC3E}">
+        <p14:creationId xmlns:p14="http://schemas.microsoft.com/office/powerpoint/2010/main" val="2566768401"/>
+      </p:ext>
+    </p:extLst>
+  </p:cSld>
+  <p:clrMapOvr>
+    <a:masterClrMapping/>
+  </p:clrMapOvr>
+</p:sld>
+</file>
+
 <file path=ppt/slides/slide2.xml><?xml version="1.0" encoding="utf-8"?>
 <p:sld xmlns:a="http://schemas.openxmlformats.org/drawingml/2006/main" xmlns:r="http://schemas.openxmlformats.org/officeDocument/2006/relationships" xmlns:p="http://schemas.openxmlformats.org/presentationml/2006/main">
   <p:cSld>
